--- a/docs/FieldMind-Compilers.pptx
+++ b/docs/FieldMind-Compilers.pptx
@@ -7511,7 +7511,7 @@
                 <a:ea typeface="Calibri" pitchFamily="34" charset="-122"/>
                 <a:cs typeface="Calibri" pitchFamily="34" charset="-120"/>
               </a:rPr>
-              <a:t>automated tests, two devices each</a:t>
+              <a:t>automated tests, run on every push</a:t>
             </a:r>
             <a:endParaRPr lang="en-US" sz="1600" dirty="0"/>
           </a:p>

--- a/docs/FieldMind-Compilers.pptx
+++ b/docs/FieldMind-Compilers.pptx
@@ -2656,7 +2656,7 @@
                 <a:ea typeface="Calibri" pitchFamily="34" charset="-122"/>
                 <a:cs typeface="Calibri" pitchFamily="34" charset="-120"/>
               </a:rPr>
-              <a:t>Write what you saw. The device shows what it will share before you save.</a:t>
+              <a:t>Write, dictate or photograph what you saw. The device shows what it will share before you save.</a:t>
             </a:r>
             <a:endParaRPr lang="en-US" sz="1600" dirty="0"/>
           </a:p>
@@ -2798,7 +2798,7 @@
                 <a:ea typeface="Calibri" pitchFamily="34" charset="-122"/>
                 <a:cs typeface="Calibri" pitchFamily="34" charset="-120"/>
               </a:rPr>
-              <a:t>Search your notes and headquarters manuals in about a millisecond.</a:t>
+              <a:t>Search your notes, photos and headquarters manuals in about a millisecond.</a:t>
             </a:r>
             <a:endParaRPr lang="en-US" sz="1600" dirty="0"/>
           </a:p>
@@ -2940,7 +2940,7 @@
                 <a:ea typeface="Calibri" pitchFamily="34" charset="-122"/>
                 <a:cs typeface="Calibri" pitchFamily="34" charset="-120"/>
               </a:rPr>
-              <a:t>Get a cited answer written on the device. No cloud call.</a:t>
+              <a:t>Get a cited answer written on the device, checked against its sources. No cloud call.</a:t>
             </a:r>
             <a:endParaRPr lang="en-US" sz="1600" dirty="0"/>
           </a:p>
@@ -2978,16 +2978,55 @@
           </a:effectLst>
         </p:spPr>
       </p:sp>
+      <p:sp>
+        <p:nvSpPr>
+          <p:cNvPr id="17" name="Text 14"/>
+          <p:cNvSpPr txBox="1"/>
+          <p:nvPr/>
+        </p:nvSpPr>
+        <p:spPr>
+          <a:xfrm>
+            <a:off x="10637215" y="6309360"/>
+            <a:ext cx="914400" cy="274320"/>
+          </a:xfrm>
+          <a:prstGeom prst="rect">
+            <a:avLst/>
+          </a:prstGeom>
+          <a:noFill/>
+          <a:ln/>
+        </p:spPr>
+        <p:txBody>
+          <a:bodyPr wrap="square" lIns="0" tIns="0" rIns="0" bIns="0" rtlCol="0" anchor="t"/>
+          <a:lstStyle/>
+          <a:p>
+            <a:pPr algn="r" indent="0" marL="0">
+              <a:buNone/>
+            </a:pPr>
+            <a:r>
+              <a:rPr lang="en-US" sz="1100" dirty="0">
+                <a:solidFill>
+                  <a:srgbClr val="5F5C54"/>
+                </a:solidFill>
+                <a:latin typeface="Courier New" pitchFamily="34" charset="0"/>
+                <a:ea typeface="Courier New" pitchFamily="34" charset="-122"/>
+                <a:cs typeface="Courier New" pitchFamily="34" charset="-120"/>
+              </a:rPr>
+              <a:t>03</a:t>
+            </a:r>
+            <a:endParaRPr lang="en-US" sz="1100" dirty="0"/>
+          </a:p>
+        </p:txBody>
+      </p:sp>
       <p:pic>
         <p:nvPicPr>
-          <p:cNvPr id="16" name="Image 0" descr="C:\Users\yadav\Downloads\hcs2\docs\img\offline-work.png">    </p:cNvPr>
+          <p:cNvPr id="18" name="Picture 17" descr="offline-work.png"/>
           <p:cNvPicPr>
             <a:picLocks noChangeAspect="1"/>
           </p:cNvPicPr>
           <p:nvPr/>
         </p:nvPicPr>
         <p:blipFill>
-          <a:blip r:embed="rId1"/>
+          <a:blip r:embed="rId4"/>
           <a:stretch>
             <a:fillRect/>
           </a:stretch>
@@ -3002,45 +3041,6 @@
           </a:prstGeom>
         </p:spPr>
       </p:pic>
-      <p:sp>
-        <p:nvSpPr>
-          <p:cNvPr id="17" name="Text 14"/>
-          <p:cNvSpPr txBox="1"/>
-          <p:nvPr/>
-        </p:nvSpPr>
-        <p:spPr>
-          <a:xfrm>
-            <a:off x="10637215" y="6309360"/>
-            <a:ext cx="914400" cy="274320"/>
-          </a:xfrm>
-          <a:prstGeom prst="rect">
-            <a:avLst/>
-          </a:prstGeom>
-          <a:noFill/>
-          <a:ln/>
-        </p:spPr>
-        <p:txBody>
-          <a:bodyPr wrap="square" lIns="0" tIns="0" rIns="0" bIns="0" rtlCol="0" anchor="t"/>
-          <a:lstStyle/>
-          <a:p>
-            <a:pPr algn="r" indent="0" marL="0">
-              <a:buNone/>
-            </a:pPr>
-            <a:r>
-              <a:rPr lang="en-US" sz="1100" dirty="0">
-                <a:solidFill>
-                  <a:srgbClr val="5F5C54"/>
-                </a:solidFill>
-                <a:latin typeface="Courier New" pitchFamily="34" charset="0"/>
-                <a:ea typeface="Courier New" pitchFamily="34" charset="-122"/>
-                <a:cs typeface="Courier New" pitchFamily="34" charset="-120"/>
-              </a:rPr>
-              <a:t>03</a:t>
-            </a:r>
-            <a:endParaRPr lang="en-US" sz="1100" dirty="0"/>
-          </a:p>
-        </p:txBody>
-      </p:sp>
     </p:spTree>
   </p:cSld>
   <p:clrMapOvr>
@@ -3277,7 +3277,7 @@
                 <a:ea typeface="Calibri" pitchFamily="34" charset="-122"/>
                 <a:cs typeface="Calibri" pitchFamily="34" charset="-120"/>
               </a:rPr>
-              <a:t>Written here, private too</a:t>
+              <a:t>Written here, private too, sealed on disk</a:t>
             </a:r>
             <a:endParaRPr lang="en-US" sz="1400" dirty="0"/>
           </a:p>
@@ -3382,7 +3382,7 @@
                 <a:ea typeface="Calibri" pitchFamily="34" charset="-122"/>
                 <a:cs typeface="Calibri" pitchFamily="34" charset="-120"/>
               </a:rPr>
-              <a:t>Copy of cloud knowledge</a:t>
+              <a:t>Cloud knowledge, or from nearby devices</a:t>
             </a:r>
             <a:endParaRPr lang="en-US" sz="1400" dirty="0"/>
           </a:p>
@@ -3487,7 +3487,7 @@
                 <a:ea typeface="Calibri" pitchFamily="34" charset="-122"/>
                 <a:cs typeface="Calibri" pitchFamily="34" charset="-120"/>
               </a:rPr>
-              <a:t>Decides what may leave</a:t>
+              <a:t>Decides what may leave, learns from you</a:t>
             </a:r>
             <a:endParaRPr lang="en-US" sz="1400" dirty="0"/>
           </a:p>
@@ -3592,7 +3592,7 @@
                 <a:ea typeface="Calibri" pitchFamily="34" charset="-122"/>
                 <a:cs typeface="Calibri" pitchFamily="34" charset="-120"/>
               </a:rPr>
-              <a:t>bge-small and BM25</a:t>
+              <a:t>bge-small and BM25, MiniLM reranker, CLIP</a:t>
             </a:r>
             <a:endParaRPr lang="en-US" sz="1400" dirty="0"/>
           </a:p>
@@ -3697,7 +3697,7 @@
                 <a:ea typeface="Calibri" pitchFamily="34" charset="-122"/>
                 <a:cs typeface="Calibri" pitchFamily="34" charset="-120"/>
               </a:rPr>
-              <a:t>Outbox and conflicts</a:t>
+              <a:t>Outbox, conflicts, activity</a:t>
             </a:r>
             <a:endParaRPr lang="en-US" sz="1400" dirty="0"/>
           </a:p>
@@ -4163,42 +4163,63 @@
             </a:r>
             <a:endParaRPr lang="en-US" sz="1500" dirty="0"/>
           </a:p>
-        </p:txBody>
-      </p:sp>
-      <p:sp>
-        <p:nvSpPr>
-          <p:cNvPr id="32" name="Text 30"/>
-          <p:cNvSpPr txBox="1"/>
-          <p:nvPr/>
-        </p:nvSpPr>
-        <p:spPr>
-          <a:xfrm>
-            <a:off x="9281160" y="5166360"/>
-            <a:ext cx="1996135" cy="594360"/>
-          </a:xfrm>
-          <a:prstGeom prst="rect">
-            <a:avLst/>
-          </a:prstGeom>
-          <a:noFill/>
-          <a:ln/>
-        </p:spPr>
-        <p:txBody>
-          <a:bodyPr wrap="square" lIns="0" tIns="0" rIns="0" bIns="0" rtlCol="0" anchor="b"/>
-          <a:lstStyle/>
-          <a:p>
-            <a:pPr indent="0" marL="0">
-              <a:buNone/>
-            </a:pPr>
-            <a:r>
-              <a:rPr lang="en-US" sz="1400" dirty="0">
-                <a:solidFill>
-                  <a:srgbClr val="F29A4A"/>
+          <a:p>
+            <a:pPr marL="342900" indent="-342900">
+              <a:spcAft>
+                <a:spcPts val="800"/>
+              </a:spcAft>
+              <a:buSzPct val="100000"/>
+              <a:buChar char="•"/>
+            </a:pPr>
+            <a:r>
+              <a:rPr lang="en-US" sz="1500" dirty="0">
+                <a:solidFill>
+                  <a:srgbClr val="BDBBB0"/>
                 </a:solidFill>
                 <a:latin typeface="Calibri" pitchFamily="34" charset="0"/>
                 <a:ea typeface="Calibri" pitchFamily="34" charset="-122"/>
                 <a:cs typeface="Calibri" pitchFamily="34" charset="-120"/>
               </a:rPr>
-              <a:t>Other devices sync here too</a:t>
+              <a:t>Photo thumbnails</a:t>
+            </a:r>
+            <a:endParaRPr lang="en-US" sz="1500" dirty="0"/>
+          </a:p>
+        </p:txBody>
+      </p:sp>
+      <p:sp>
+        <p:nvSpPr>
+          <p:cNvPr id="32" name="Text 30"/>
+          <p:cNvSpPr txBox="1"/>
+          <p:nvPr/>
+        </p:nvSpPr>
+        <p:spPr>
+          <a:xfrm>
+            <a:off x="9281160" y="5166360"/>
+            <a:ext cx="1996135" cy="594360"/>
+          </a:xfrm>
+          <a:prstGeom prst="rect">
+            <a:avLst/>
+          </a:prstGeom>
+          <a:noFill/>
+          <a:ln/>
+        </p:spPr>
+        <p:txBody>
+          <a:bodyPr wrap="square" lIns="0" tIns="0" rIns="0" bIns="0" rtlCol="0" anchor="b"/>
+          <a:lstStyle/>
+          <a:p>
+            <a:pPr indent="0" marL="0">
+              <a:buNone/>
+            </a:pPr>
+            <a:r>
+              <a:rPr lang="en-US" sz="1400" dirty="0">
+                <a:solidFill>
+                  <a:srgbClr val="F29A4A"/>
+                </a:solidFill>
+                <a:latin typeface="Calibri" pitchFamily="34" charset="0"/>
+                <a:ea typeface="Calibri" pitchFamily="34" charset="-122"/>
+                <a:cs typeface="Calibri" pitchFamily="34" charset="-120"/>
+              </a:rPr>
+              <a:t>Other devices sync here, or with each other when it is gone</a:t>
             </a:r>
             <a:endParaRPr lang="en-US" sz="1400" dirty="0"/>
           </a:p>
@@ -5175,7 +5196,7 @@
                 <a:ea typeface="Calibri" pitchFamily="34" charset="-122"/>
                 <a:cs typeface="Calibri" pitchFamily="34" charset="-120"/>
               </a:rPr>
-              <a:t>Decided in about 20 ms on the device by a name recognition model, pattern detectors and a semantic classifier. Vectors for a masked note are computed from the masked text.</a:t>
+              <a:t>Decided in about 20 ms on the device by a name recognition model, pattern detectors (credentials, contacts, identity numbers, vehicles, badges, addresses) and a semantic classifier. Vectors for a masked note are computed from the masked text. Override a decision and notes like it follow your choice from then on.</a:t>
             </a:r>
             <a:endParaRPr lang="en-US" sz="1600" dirty="0"/>
           </a:p>
@@ -5427,7 +5448,7 @@
                 <a:ea typeface="Calibri" pitchFamily="34" charset="-122"/>
                 <a:cs typeface="Calibri" pitchFamily="34" charset="-120"/>
               </a:rPr>
-              <a:t>An upload only lands if the cloud is still at the version the device last saw.</a:t>
+              <a:t>An upload only lands if the cloud is still at the version the device last saw. An edit made mid-upload is rebased, not lost.</a:t>
             </a:r>
             <a:endParaRPr lang="en-US" sz="1600" dirty="0"/>
           </a:p>
@@ -5711,7 +5732,7 @@
                 <a:ea typeface="Calibri" pitchFamily="34" charset="-122"/>
                 <a:cs typeface="Calibri" pitchFamily="34" charset="-120"/>
               </a:rPr>
-              <a:t>Keep mine, accept theirs, keep both or combine. Even while offline.</a:t>
+              <a:t>Keep mine, accept theirs, keep both or combine. Even while offline. One click stages a conflict for the demo.</a:t>
             </a:r>
             <a:endParaRPr lang="en-US" sz="1600" dirty="0"/>
           </a:p>
@@ -5749,16 +5770,55 @@
           </a:effectLst>
         </p:spPr>
       </p:sp>
+      <p:sp>
+        <p:nvSpPr>
+          <p:cNvPr id="17" name="Text 14"/>
+          <p:cNvSpPr txBox="1"/>
+          <p:nvPr/>
+        </p:nvSpPr>
+        <p:spPr>
+          <a:xfrm>
+            <a:off x="10637215" y="6309360"/>
+            <a:ext cx="914400" cy="274320"/>
+          </a:xfrm>
+          <a:prstGeom prst="rect">
+            <a:avLst/>
+          </a:prstGeom>
+          <a:noFill/>
+          <a:ln/>
+        </p:spPr>
+        <p:txBody>
+          <a:bodyPr wrap="square" lIns="0" tIns="0" rIns="0" bIns="0" rtlCol="0" anchor="t"/>
+          <a:lstStyle/>
+          <a:p>
+            <a:pPr algn="r" indent="0" marL="0">
+              <a:buNone/>
+            </a:pPr>
+            <a:r>
+              <a:rPr lang="en-US" sz="1100" dirty="0">
+                <a:solidFill>
+                  <a:srgbClr val="5F5C54"/>
+                </a:solidFill>
+                <a:latin typeface="Courier New" pitchFamily="34" charset="0"/>
+                <a:ea typeface="Courier New" pitchFamily="34" charset="-122"/>
+                <a:cs typeface="Courier New" pitchFamily="34" charset="-120"/>
+              </a:rPr>
+              <a:t>06</a:t>
+            </a:r>
+            <a:endParaRPr lang="en-US" sz="1100" dirty="0"/>
+          </a:p>
+        </p:txBody>
+      </p:sp>
       <p:pic>
         <p:nvPicPr>
-          <p:cNvPr id="16" name="Image 0" descr="C:\Users\yadav\Downloads\hcs2\docs\img\conflict.png">    </p:cNvPr>
+          <p:cNvPr id="18" name="Picture 17" descr="conflict.png"/>
           <p:cNvPicPr>
             <a:picLocks noChangeAspect="1"/>
           </p:cNvPicPr>
           <p:nvPr/>
         </p:nvPicPr>
         <p:blipFill>
-          <a:blip r:embed="rId1"/>
+          <a:blip r:embed="rId4"/>
           <a:stretch>
             <a:fillRect/>
           </a:stretch>
@@ -5773,45 +5833,6 @@
           </a:prstGeom>
         </p:spPr>
       </p:pic>
-      <p:sp>
-        <p:nvSpPr>
-          <p:cNvPr id="17" name="Text 14"/>
-          <p:cNvSpPr txBox="1"/>
-          <p:nvPr/>
-        </p:nvSpPr>
-        <p:spPr>
-          <a:xfrm>
-            <a:off x="10637215" y="6309360"/>
-            <a:ext cx="914400" cy="274320"/>
-          </a:xfrm>
-          <a:prstGeom prst="rect">
-            <a:avLst/>
-          </a:prstGeom>
-          <a:noFill/>
-          <a:ln/>
-        </p:spPr>
-        <p:txBody>
-          <a:bodyPr wrap="square" lIns="0" tIns="0" rIns="0" bIns="0" rtlCol="0" anchor="t"/>
-          <a:lstStyle/>
-          <a:p>
-            <a:pPr algn="r" indent="0" marL="0">
-              <a:buNone/>
-            </a:pPr>
-            <a:r>
-              <a:rPr lang="en-US" sz="1100" dirty="0">
-                <a:solidFill>
-                  <a:srgbClr val="5F5C54"/>
-                </a:solidFill>
-                <a:latin typeface="Courier New" pitchFamily="34" charset="0"/>
-                <a:ea typeface="Courier New" pitchFamily="34" charset="-122"/>
-                <a:cs typeface="Courier New" pitchFamily="34" charset="-120"/>
-              </a:rPr>
-              <a:t>06</a:t>
-            </a:r>
-            <a:endParaRPr lang="en-US" sz="1100" dirty="0"/>
-          </a:p>
-        </p:txBody>
-      </p:sp>
     </p:spTree>
   </p:cSld>
   <p:clrMapOvr>
@@ -6130,7 +6151,7 @@
                           <a:ea typeface="Calibri" pitchFamily="34" charset="-122"/>
                           <a:cs typeface="Calibri" pitchFamily="34" charset="-120"/>
                         </a:rPr>
-                        <a:t>Two per device: local notes and a cloud replica</a:t>
+                        <a:t>Three per device: local notes, a cloud replica, and photos with a CLIP vector each</a:t>
                       </a:r>
                       <a:endParaRPr lang="en-US" sz="1600" dirty="0">
                         <a:latin typeface="Calibri" charset="0"/>
@@ -6394,7 +6415,7 @@
                           <a:ea typeface="Calibri" pitchFamily="34" charset="-122"/>
                           <a:cs typeface="Calibri" pitchFamily="34" charset="-120"/>
                         </a:rPr>
-                        <a:t>Meaning search narrowed by asset, scope and status</a:t>
+                        <a:t>Meaning search narrowed by asset, scope and status; photos found by what they show</a:t>
                       </a:r>
                       <a:endParaRPr lang="en-US" sz="1600" dirty="0">
                         <a:latin typeface="Calibri" charset="0"/>
@@ -6593,7 +6614,7 @@
                           <a:ea typeface="Calibri" pitchFamily="34" charset="-122"/>
                           <a:cs typeface="Calibri" pitchFamily="34" charset="-120"/>
                         </a:rPr>
-                        <a:t>Conditional upsert</a:t>
+                        <a:t>Conditional upsert and payload overwrite</a:t>
                       </a:r>
                       <a:endParaRPr lang="en-US" sz="1600" dirty="0">
                         <a:latin typeface="Calibri" charset="0"/>
@@ -6658,7 +6679,7 @@
                           <a:ea typeface="Calibri" pitchFamily="34" charset="-122"/>
                           <a:cs typeface="Calibri" pitchFamily="34" charset="-120"/>
                         </a:rPr>
-                        <a:t>Compare and swap, so devices never clobber each other</a:t>
+                        <a:t>Compare and swap, so devices never clobber each other; payload-only patches skip the vectors</a:t>
                       </a:r>
                       <a:endParaRPr lang="en-US" sz="1600" dirty="0">
                         <a:latin typeface="Calibri" charset="0"/>
@@ -6790,7 +6811,7 @@
                           <a:ea typeface="Calibri" pitchFamily="34" charset="-122"/>
                           <a:cs typeface="Calibri" pitchFamily="34" charset="-120"/>
                         </a:rPr>
-                        <a:t>The same dense and sparse vectors on edge and server</a:t>
+                        <a:t>The same dense and sparse vectors on edge and server, versioned payloads</a:t>
                       </a:r>
                       <a:endParaRPr lang="en-US" sz="1600" dirty="0">
                         <a:latin typeface="Calibri" charset="0"/>
@@ -6876,7 +6897,7 @@
                 <a:ea typeface="Courier New" pitchFamily="34" charset="-122"/>
                 <a:cs typeface="Courier New" pitchFamily="34" charset="-120"/>
               </a:rPr>
-              <a:t>qdrant-edge-py 0.8.0 with Qdrant Server 1.19.1</a:t>
+              <a:t>qdrant-edge-py 0.8.0 with Qdrant Server 1.19.2, pinned and tested in CI</a:t>
             </a:r>
             <a:endParaRPr lang="en-US" sz="1200" dirty="0"/>
           </a:p>
@@ -7196,7 +7217,7 @@
                 <a:ea typeface="Calibri" pitchFamily="34" charset="-122"/>
                 <a:cs typeface="Calibri" pitchFamily="34" charset="-120"/>
               </a:rPr>
-              <a:t>network calls to search or answer</a:t>
+              <a:t>network calls to search, answer or find a photo</a:t>
             </a:r>
             <a:endParaRPr lang="en-US" sz="1600" dirty="0"/>
           </a:p>
@@ -7472,7 +7493,7 @@
                 <a:ea typeface="Arial" pitchFamily="34" charset="-122"/>
                 <a:cs typeface="Arial" pitchFamily="34" charset="-120"/>
               </a:rPr>
-              <a:t>57</a:t>
+              <a:t>106</a:t>
             </a:r>
             <a:endParaRPr lang="en-US" sz="5400" dirty="0"/>
           </a:p>
@@ -7511,7 +7532,7 @@
                 <a:ea typeface="Calibri" pitchFamily="34" charset="-122"/>
                 <a:cs typeface="Calibri" pitchFamily="34" charset="-120"/>
               </a:rPr>
-              <a:t>automated tests, run on every push</a:t>
+              <a:t>tests on every push: two devices, a real Qdrant Server, a real browser</a:t>
             </a:r>
             <a:endParaRPr lang="en-US" sz="1600" dirty="0"/>
           </a:p>
@@ -7655,7 +7676,7 @@
                 <a:ea typeface="Calibri" pitchFamily="34" charset="-122"/>
                 <a:cs typeface="Calibri" pitchFamily="34" charset="-120"/>
               </a:rPr>
-              <a:t>Ryzen 7 7435HS laptop, RTX 3050 4 GB. Also verified on Linux through a real network disconnect.</a:t>
+              <a:t>Ryzen 7 7435HS laptop, RTX 3050 4 GB. Also verified on Linux through a real network disconnect, and on arm64.</a:t>
             </a:r>
             <a:endParaRPr lang="en-US" sz="1200" dirty="0"/>
           </a:p>
@@ -8280,7 +8301,7 @@
                 <a:ea typeface="Calibri" pitchFamily="34" charset="-122"/>
                 <a:cs typeface="Calibri" pitchFamily="34" charset="-120"/>
               </a:rPr>
-              <a:t>Two devices disagree, a person decides</a:t>
+              <a:t>Two devices disagree, a person decides (one click to stage)</a:t>
             </a:r>
             <a:endParaRPr lang="en-US" sz="2200" dirty="0"/>
           </a:p>
@@ -8346,7 +8367,7 @@
                 <a:ea typeface="Arial" pitchFamily="34" charset="-122"/>
                 <a:cs typeface="Arial" pitchFamily="34" charset="-120"/>
               </a:rPr>
-              <a:t>Next</a:t>
+              <a:t>Also in the box</a:t>
             </a:r>
             <a:endParaRPr lang="en-US" sz="1800" dirty="0"/>
           </a:p>
@@ -8389,7 +8410,7 @@
                 <a:ea typeface="Calibri" pitchFamily="34" charset="-122"/>
                 <a:cs typeface="Calibri" pitchFamily="34" charset="-120"/>
               </a:rPr>
-              <a:t>Encrypt notes at rest</a:t>
+              <a:t>Private text sealed on disk</a:t>
             </a:r>
             <a:endParaRPr lang="en-US" sz="1700" dirty="0"/>
           </a:p>
@@ -8410,7 +8431,7 @@
                 <a:ea typeface="Calibri" pitchFamily="34" charset="-122"/>
                 <a:cs typeface="Calibri" pitchFamily="34" charset="-120"/>
               </a:rPr>
-              <a:t>TLS for remote dashboards</a:t>
+              <a:t>Setup code claims the first PIN</a:t>
             </a:r>
             <a:endParaRPr lang="en-US" sz="1700" dirty="0"/>
           </a:p>
@@ -8431,7 +8452,70 @@
                 <a:ea typeface="Calibri" pitchFamily="34" charset="-122"/>
                 <a:cs typeface="Calibri" pitchFamily="34" charset="-120"/>
               </a:rPr>
-              <a:t>Name masking beyond English</a:t>
+              <a:t>Devices learn from each other offline</a:t>
+            </a:r>
+            <a:endParaRPr lang="en-US" sz="1700" dirty="0"/>
+          </a:p>
+          <a:p>
+            <a:pPr marL="342900" indent="-342900">
+              <a:spcAft>
+                <a:spcPts val="1200"/>
+              </a:spcAft>
+              <a:buSzPct val="100000"/>
+              <a:buChar char="•"/>
+            </a:pPr>
+            <a:r>
+              <a:rPr lang="en-US" sz="1700" dirty="0">
+                <a:solidFill>
+                  <a:srgbClr val="BDBBB0"/>
+                </a:solidFill>
+                <a:latin typeface="Calibri" pitchFamily="34" charset="0"/>
+                <a:ea typeface="Calibri" pitchFamily="34" charset="-122"/>
+                <a:cs typeface="Calibri" pitchFamily="34" charset="-120"/>
+              </a:rPr>
+              <a:t>Photos searchable by what they show</a:t>
+            </a:r>
+            <a:endParaRPr lang="en-US" sz="1700" dirty="0"/>
+          </a:p>
+          <a:p>
+            <a:pPr marL="342900" indent="-342900">
+              <a:spcAft>
+                <a:spcPts val="1200"/>
+              </a:spcAft>
+              <a:buSzPct val="100000"/>
+              <a:buChar char="•"/>
+            </a:pPr>
+            <a:r>
+              <a:rPr lang="en-US" sz="1700" dirty="0">
+                <a:solidFill>
+                  <a:srgbClr val="BDBBB0"/>
+                </a:solidFill>
+                <a:latin typeface="Calibri" pitchFamily="34" charset="0"/>
+                <a:ea typeface="Calibri" pitchFamily="34" charset="-122"/>
+                <a:cs typeface="Calibri" pitchFamily="34" charset="-120"/>
+              </a:rPr>
+              <a:t>Encrypted backup to a new device</a:t>
+            </a:r>
+            <a:endParaRPr lang="en-US" sz="1700" dirty="0"/>
+          </a:p>
+          <a:p>
+            <a:pPr marL="342900" indent="-342900">
+              <a:spcAft>
+                <a:spcPts val="1200"/>
+              </a:spcAft>
+              <a:buSzPct val="100000"/>
+              <a:buChar char="•"/>
+            </a:pPr>
+            <a:r>
+              <a:rPr lang="en-US" sz="1700" dirty="0">
+                <a:solidFill>
+                  <a:srgbClr val="BDBBB0"/>
+                </a:solidFill>
+                <a:latin typeface="Calibri" pitchFamily="34" charset="0"/>
+                <a:ea typeface="Calibri" pitchFamily="34" charset="-122"/>
+                <a:cs typeface="Calibri" pitchFamily="34" charset="-120"/>
+              </a:rPr>
+              <a:t>Shift report, phone layout, dictation</a:t>
             </a:r>
             <a:endParaRPr lang="en-US" sz="1700" dirty="0"/>
           </a:p>

--- a/docs/FieldMind-Compilers.pptx
+++ b/docs/FieldMind-Compilers.pptx
@@ -3026,7 +3026,7 @@
           <p:nvPr/>
         </p:nvPicPr>
         <p:blipFill>
-          <a:blip r:embed="rId4"/>
+          <a:blip r:embed="rId5"/>
           <a:stretch>
             <a:fillRect/>
           </a:stretch>
@@ -5818,7 +5818,7 @@
           <p:nvPr/>
         </p:nvPicPr>
         <p:blipFill>
-          <a:blip r:embed="rId4"/>
+          <a:blip r:embed="rId5"/>
           <a:stretch>
             <a:fillRect/>
           </a:stretch>

--- a/docs/FieldMind-Compilers.pptx
+++ b/docs/FieldMind-Compilers.pptx
@@ -14,6 +14,7 @@
     <p:sldId id="262" r:id="rId8"/>
     <p:sldId id="263" r:id="rId9"/>
     <p:sldId id="264" r:id="rId10"/>
+    <p:sldId id="265" r:id="rId16"/>
   </p:sldIdLst>
   <p:notesMasterIdLst>
     <p:notesMasterId r:id="rId11"/>
@@ -1840,6 +1841,595 @@
 </p:sld>
 </file>
 
+<file path=ppt/slides/slide10.xml><?xml version="1.0" encoding="utf-8"?>
+<p:sld xmlns:a="http://schemas.openxmlformats.org/drawingml/2006/main" xmlns:p="http://schemas.openxmlformats.org/presentationml/2006/main" xmlns:r="http://schemas.openxmlformats.org/officeDocument/2006/relationships">
+  <p:cSld>
+    <p:bg>
+      <p:bgPr>
+        <a:solidFill>
+          <a:srgbClr val="161714"/>
+        </a:solidFill>
+        <a:effectLst/>
+      </p:bgPr>
+    </p:bg>
+    <p:spTree>
+      <p:nvGrpSpPr>
+        <p:cNvPr id="1" name=""/>
+        <p:cNvGrpSpPr/>
+        <p:nvPr/>
+      </p:nvGrpSpPr>
+      <p:grpSpPr/>
+      <p:sp>
+        <p:nvSpPr>
+          <p:cNvPr id="2" name="TextBox 1"/>
+          <p:cNvSpPr txBox="1"/>
+          <p:nvPr/>
+        </p:nvSpPr>
+        <p:spPr>
+          <a:xfrm>
+            <a:off x="640080" y="548640"/>
+            <a:ext cx="10881360" cy="822960"/>
+          </a:xfrm>
+          <a:prstGeom prst="rect">
+            <a:avLst/>
+          </a:prstGeom>
+          <a:noFill/>
+        </p:spPr>
+        <p:txBody>
+          <a:bodyPr wrap="square">
+            <a:spAutoFit/>
+          </a:bodyPr>
+          <a:lstStyle/>
+          <a:p>
+            <a:r>
+              <a:rPr sz="3600" b="1">
+                <a:solidFill>
+                  <a:srgbClr val="FFFFFF"/>
+                </a:solidFill>
+                <a:latin typeface="Arial"/>
+              </a:rPr>
+              <a:t>Try it live</a:t>
+            </a:r>
+          </a:p>
+        </p:txBody>
+      </p:sp>
+      <p:sp>
+        <p:nvSpPr>
+          <p:cNvPr id="3" name="Rounded Rectangle 2"/>
+          <p:cNvSpPr/>
+          <p:nvPr/>
+        </p:nvSpPr>
+        <p:spPr>
+          <a:xfrm>
+            <a:off x="640080" y="1737360"/>
+            <a:ext cx="5303520" cy="2743200"/>
+          </a:xfrm>
+          <a:prstGeom prst="roundRect">
+            <a:avLst>
+              <a:gd name="adj" fmla="val 8000"/>
+            </a:avLst>
+          </a:prstGeom>
+          <a:solidFill>
+            <a:srgbClr val="1E201C"/>
+          </a:solidFill>
+          <a:ln w="12700">
+            <a:solidFill>
+              <a:srgbClr val="2E302A"/>
+            </a:solidFill>
+          </a:ln>
+        </p:spPr>
+        <p:style>
+          <a:lnRef idx="1">
+            <a:schemeClr val="accent1"/>
+          </a:lnRef>
+          <a:fillRef idx="3">
+            <a:schemeClr val="accent1"/>
+          </a:fillRef>
+          <a:effectRef idx="2">
+            <a:schemeClr val="accent1"/>
+          </a:effectRef>
+          <a:fontRef idx="minor">
+            <a:schemeClr val="lt1"/>
+          </a:fontRef>
+        </p:style>
+        <p:txBody>
+          <a:bodyPr rtlCol="0" anchor="ctr"/>
+          <a:lstStyle/>
+          <a:p>
+            <a:pPr algn="ctr"/>
+          </a:p>
+        </p:txBody>
+      </p:sp>
+      <p:pic>
+        <p:nvPicPr>
+          <p:cNvPr id="4" name="Picture 3" descr="qr-edge-a.png"/>
+          <p:cNvPicPr>
+            <a:picLocks noChangeAspect="1"/>
+          </p:cNvPicPr>
+          <p:nvPr/>
+        </p:nvPicPr>
+        <p:blipFill>
+          <a:blip r:embed="rId2"/>
+          <a:stretch>
+            <a:fillRect/>
+          </a:stretch>
+        </p:blipFill>
+        <p:spPr>
+          <a:xfrm>
+            <a:off x="868680" y="1965960"/>
+            <a:ext cx="2286000" cy="2286000"/>
+          </a:xfrm>
+          <a:prstGeom prst="rect">
+            <a:avLst/>
+          </a:prstGeom>
+        </p:spPr>
+      </p:pic>
+      <p:sp>
+        <p:nvSpPr>
+          <p:cNvPr id="5" name="TextBox 4"/>
+          <p:cNvSpPr txBox="1"/>
+          <p:nvPr/>
+        </p:nvSpPr>
+        <p:spPr>
+          <a:xfrm>
+            <a:off x="3291840" y="1920240"/>
+            <a:ext cx="2560320" cy="365760"/>
+          </a:xfrm>
+          <a:prstGeom prst="rect">
+            <a:avLst/>
+          </a:prstGeom>
+          <a:noFill/>
+        </p:spPr>
+        <p:txBody>
+          <a:bodyPr wrap="square">
+            <a:spAutoFit/>
+          </a:bodyPr>
+          <a:lstStyle/>
+          <a:p>
+            <a:r>
+              <a:rPr sz="1200" b="1">
+                <a:solidFill>
+                  <a:srgbClr val="F29A4A"/>
+                </a:solidFill>
+                <a:latin typeface="Courier New"/>
+              </a:rPr>
+              <a:t>LIVE DEVICE</a:t>
+            </a:r>
+          </a:p>
+        </p:txBody>
+      </p:sp>
+      <p:sp>
+        <p:nvSpPr>
+          <p:cNvPr id="6" name="TextBox 5"/>
+          <p:cNvSpPr txBox="1"/>
+          <p:nvPr/>
+        </p:nvSpPr>
+        <p:spPr>
+          <a:xfrm>
+            <a:off x="3291840" y="2286000"/>
+            <a:ext cx="2560320" cy="731520"/>
+          </a:xfrm>
+          <a:prstGeom prst="rect">
+            <a:avLst/>
+          </a:prstGeom>
+          <a:noFill/>
+        </p:spPr>
+        <p:txBody>
+          <a:bodyPr wrap="square">
+            <a:spAutoFit/>
+          </a:bodyPr>
+          <a:lstStyle/>
+          <a:p>
+            <a:r>
+              <a:rPr sz="1600" b="1">
+                <a:solidFill>
+                  <a:srgbClr val="FFFFFF"/>
+                </a:solidFill>
+                <a:latin typeface="Arial"/>
+              </a:rPr>
+              <a:t>fieldmindedgea.hidenplay.net</a:t>
+            </a:r>
+          </a:p>
+        </p:txBody>
+      </p:sp>
+      <p:sp>
+        <p:nvSpPr>
+          <p:cNvPr id="7" name="TextBox 6"/>
+          <p:cNvSpPr txBox="1"/>
+          <p:nvPr/>
+        </p:nvSpPr>
+        <p:spPr>
+          <a:xfrm>
+            <a:off x="3291840" y="2926080"/>
+            <a:ext cx="2560320" cy="1463040"/>
+          </a:xfrm>
+          <a:prstGeom prst="rect">
+            <a:avLst/>
+          </a:prstGeom>
+          <a:noFill/>
+        </p:spPr>
+        <p:txBody>
+          <a:bodyPr wrap="square">
+            <a:spAutoFit/>
+          </a:bodyPr>
+          <a:lstStyle/>
+          <a:p>
+            <a:r>
+              <a:rPr sz="1300" b="0">
+                <a:solidFill>
+                  <a:srgbClr val="BDBBB0"/>
+                </a:solidFill>
+                <a:latin typeface="Calibri"/>
+              </a:rPr>
+              <a:t>edge-a, running 24/7 on an arm64 server with Qdrant Cloud. Ask us for the PIN, then click Demo guide. A second device, edge-b, syncs with it.</a:t>
+            </a:r>
+          </a:p>
+        </p:txBody>
+      </p:sp>
+      <p:sp>
+        <p:nvSpPr>
+          <p:cNvPr id="8" name="Rounded Rectangle 7"/>
+          <p:cNvSpPr/>
+          <p:nvPr/>
+        </p:nvSpPr>
+        <p:spPr>
+          <a:xfrm>
+            <a:off x="6217920" y="1737360"/>
+            <a:ext cx="5303520" cy="2743200"/>
+          </a:xfrm>
+          <a:prstGeom prst="roundRect">
+            <a:avLst>
+              <a:gd name="adj" fmla="val 8000"/>
+            </a:avLst>
+          </a:prstGeom>
+          <a:solidFill>
+            <a:srgbClr val="1E201C"/>
+          </a:solidFill>
+          <a:ln w="12700">
+            <a:solidFill>
+              <a:srgbClr val="2E302A"/>
+            </a:solidFill>
+          </a:ln>
+        </p:spPr>
+        <p:style>
+          <a:lnRef idx="1">
+            <a:schemeClr val="accent1"/>
+          </a:lnRef>
+          <a:fillRef idx="3">
+            <a:schemeClr val="accent1"/>
+          </a:fillRef>
+          <a:effectRef idx="2">
+            <a:schemeClr val="accent1"/>
+          </a:effectRef>
+          <a:fontRef idx="minor">
+            <a:schemeClr val="lt1"/>
+          </a:fontRef>
+        </p:style>
+        <p:txBody>
+          <a:bodyPr rtlCol="0" anchor="ctr"/>
+          <a:lstStyle/>
+          <a:p>
+            <a:pPr algn="ctr"/>
+          </a:p>
+        </p:txBody>
+      </p:sp>
+      <p:pic>
+        <p:nvPicPr>
+          <p:cNvPr id="9" name="Picture 8" descr="qr-repo.png"/>
+          <p:cNvPicPr>
+            <a:picLocks noChangeAspect="1"/>
+          </p:cNvPicPr>
+          <p:nvPr/>
+        </p:nvPicPr>
+        <p:blipFill>
+          <a:blip r:embed="rId3"/>
+          <a:stretch>
+            <a:fillRect/>
+          </a:stretch>
+        </p:blipFill>
+        <p:spPr>
+          <a:xfrm>
+            <a:off x="6446520" y="1965960"/>
+            <a:ext cx="2286000" cy="2286000"/>
+          </a:xfrm>
+          <a:prstGeom prst="rect">
+            <a:avLst/>
+          </a:prstGeom>
+        </p:spPr>
+      </p:pic>
+      <p:sp>
+        <p:nvSpPr>
+          <p:cNvPr id="10" name="TextBox 9"/>
+          <p:cNvSpPr txBox="1"/>
+          <p:nvPr/>
+        </p:nvSpPr>
+        <p:spPr>
+          <a:xfrm>
+            <a:off x="8869680" y="1920240"/>
+            <a:ext cx="2560320" cy="365760"/>
+          </a:xfrm>
+          <a:prstGeom prst="rect">
+            <a:avLst/>
+          </a:prstGeom>
+          <a:noFill/>
+        </p:spPr>
+        <p:txBody>
+          <a:bodyPr wrap="square">
+            <a:spAutoFit/>
+          </a:bodyPr>
+          <a:lstStyle/>
+          <a:p>
+            <a:r>
+              <a:rPr sz="1200" b="1">
+                <a:solidFill>
+                  <a:srgbClr val="F29A4A"/>
+                </a:solidFill>
+                <a:latin typeface="Courier New"/>
+              </a:rPr>
+              <a:t>CODE AND TESTS</a:t>
+            </a:r>
+          </a:p>
+        </p:txBody>
+      </p:sp>
+      <p:sp>
+        <p:nvSpPr>
+          <p:cNvPr id="11" name="TextBox 10"/>
+          <p:cNvSpPr txBox="1"/>
+          <p:nvPr/>
+        </p:nvSpPr>
+        <p:spPr>
+          <a:xfrm>
+            <a:off x="8869680" y="2286000"/>
+            <a:ext cx="2560320" cy="731520"/>
+          </a:xfrm>
+          <a:prstGeom prst="rect">
+            <a:avLst/>
+          </a:prstGeom>
+          <a:noFill/>
+        </p:spPr>
+        <p:txBody>
+          <a:bodyPr wrap="square">
+            <a:spAutoFit/>
+          </a:bodyPr>
+          <a:lstStyle/>
+          <a:p>
+            <a:r>
+              <a:rPr sz="1600" b="1">
+                <a:solidFill>
+                  <a:srgbClr val="FFFFFF"/>
+                </a:solidFill>
+                <a:latin typeface="Arial"/>
+              </a:rPr>
+              <a:t>github.com/yabhinav1/fieldmind</a:t>
+            </a:r>
+          </a:p>
+        </p:txBody>
+      </p:sp>
+      <p:sp>
+        <p:nvSpPr>
+          <p:cNvPr id="12" name="TextBox 11"/>
+          <p:cNvSpPr txBox="1"/>
+          <p:nvPr/>
+        </p:nvSpPr>
+        <p:spPr>
+          <a:xfrm>
+            <a:off x="8869680" y="2926080"/>
+            <a:ext cx="2560320" cy="1463040"/>
+          </a:xfrm>
+          <a:prstGeom prst="rect">
+            <a:avLst/>
+          </a:prstGeom>
+          <a:noFill/>
+        </p:spPr>
+        <p:txBody>
+          <a:bodyPr wrap="square">
+            <a:spAutoFit/>
+          </a:bodyPr>
+          <a:lstStyle/>
+          <a:p>
+            <a:r>
+              <a:rPr sz="1300" b="0">
+                <a:solidFill>
+                  <a:srgbClr val="BDBBB0"/>
+                </a:solidFill>
+                <a:latin typeface="Calibri"/>
+              </a:rPr>
+              <a:t>MIT. 106 tests on every push against a real Qdrant Server and a real browser. docker compose --profile demo up runs it on any laptop.</a:t>
+            </a:r>
+          </a:p>
+        </p:txBody>
+      </p:sp>
+      <p:sp>
+        <p:nvSpPr>
+          <p:cNvPr id="13" name="Rounded Rectangle 12"/>
+          <p:cNvSpPr/>
+          <p:nvPr/>
+        </p:nvSpPr>
+        <p:spPr>
+          <a:xfrm>
+            <a:off x="640080" y="4754880"/>
+            <a:ext cx="10881360" cy="1188720"/>
+          </a:xfrm>
+          <a:prstGeom prst="roundRect">
+            <a:avLst>
+              <a:gd name="adj" fmla="val 8000"/>
+            </a:avLst>
+          </a:prstGeom>
+          <a:solidFill>
+            <a:srgbClr val="1E201C"/>
+          </a:solidFill>
+          <a:ln w="12700">
+            <a:solidFill>
+              <a:srgbClr val="2E302A"/>
+            </a:solidFill>
+          </a:ln>
+        </p:spPr>
+        <p:style>
+          <a:lnRef idx="1">
+            <a:schemeClr val="accent1"/>
+          </a:lnRef>
+          <a:fillRef idx="3">
+            <a:schemeClr val="accent1"/>
+          </a:fillRef>
+          <a:effectRef idx="2">
+            <a:schemeClr val="accent1"/>
+          </a:effectRef>
+          <a:fontRef idx="minor">
+            <a:schemeClr val="lt1"/>
+          </a:fontRef>
+        </p:style>
+        <p:txBody>
+          <a:bodyPr rtlCol="0" anchor="ctr"/>
+          <a:lstStyle/>
+          <a:p>
+            <a:pPr algn="ctr"/>
+          </a:p>
+        </p:txBody>
+      </p:sp>
+      <p:sp>
+        <p:nvSpPr>
+          <p:cNvPr id="14" name="TextBox 13"/>
+          <p:cNvSpPr txBox="1"/>
+          <p:nvPr/>
+        </p:nvSpPr>
+        <p:spPr>
+          <a:xfrm>
+            <a:off x="914400" y="4846320"/>
+            <a:ext cx="10332720" cy="365760"/>
+          </a:xfrm>
+          <a:prstGeom prst="rect">
+            <a:avLst/>
+          </a:prstGeom>
+          <a:noFill/>
+        </p:spPr>
+        <p:txBody>
+          <a:bodyPr wrap="square">
+            <a:spAutoFit/>
+          </a:bodyPr>
+          <a:lstStyle/>
+          <a:p>
+            <a:r>
+              <a:rPr sz="1200" b="1">
+                <a:solidFill>
+                  <a:srgbClr val="F29A4A"/>
+                </a:solidFill>
+                <a:latin typeface="Courier New"/>
+              </a:rPr>
+              <a:t>FIVE THINGS TO TRY IN TWO MINUTES</a:t>
+            </a:r>
+          </a:p>
+        </p:txBody>
+      </p:sp>
+      <p:sp>
+        <p:nvSpPr>
+          <p:cNvPr id="15" name="TextBox 14"/>
+          <p:cNvSpPr txBox="1"/>
+          <p:nvPr/>
+        </p:nvSpPr>
+        <p:spPr>
+          <a:xfrm>
+            <a:off x="914400" y="5212080"/>
+            <a:ext cx="10332720" cy="731520"/>
+          </a:xfrm>
+          <a:prstGeom prst="rect">
+            <a:avLst/>
+          </a:prstGeom>
+          <a:noFill/>
+        </p:spPr>
+        <p:txBody>
+          <a:bodyPr wrap="square">
+            <a:spAutoFit/>
+          </a:bodyPr>
+          <a:lstStyle/>
+          <a:p>
+            <a:r>
+              <a:rPr sz="1400" b="0">
+                <a:solidFill>
+                  <a:srgbClr val="ECEBE4"/>
+                </a:solidFill>
+                <a:latin typeface="Calibri"/>
+              </a:rPr>
+              <a:t>Network switch off, keep working  ·  Dictate a note  ·  Ask “is a vibration of 7.2 mm/s acceptable”  ·  Type a note with a name and a phone number, watch the preview mask them  ·  Demo guide → Stage a conflict, then decide</a:t>
+            </a:r>
+          </a:p>
+        </p:txBody>
+      </p:sp>
+      <p:sp>
+        <p:nvSpPr>
+          <p:cNvPr id="16" name="TextBox 15"/>
+          <p:cNvSpPr txBox="1"/>
+          <p:nvPr/>
+        </p:nvSpPr>
+        <p:spPr>
+          <a:xfrm>
+            <a:off x="640080" y="6217920"/>
+            <a:ext cx="8229600" cy="274320"/>
+          </a:xfrm>
+          <a:prstGeom prst="rect">
+            <a:avLst/>
+          </a:prstGeom>
+          <a:noFill/>
+        </p:spPr>
+        <p:txBody>
+          <a:bodyPr wrap="square">
+            <a:spAutoFit/>
+          </a:bodyPr>
+          <a:lstStyle/>
+          <a:p>
+            <a:r>
+              <a:rPr sz="1200" b="0">
+                <a:solidFill>
+                  <a:srgbClr val="9C998D"/>
+                </a:solidFill>
+                <a:latin typeface="Courier New"/>
+              </a:rPr>
+              <a:t>Team Compilers  ·  Problem statement 03  ·  Qdrant Edge</a:t>
+            </a:r>
+          </a:p>
+        </p:txBody>
+      </p:sp>
+      <p:sp>
+        <p:nvSpPr>
+          <p:cNvPr id="17" name="TextBox 16"/>
+          <p:cNvSpPr txBox="1"/>
+          <p:nvPr/>
+        </p:nvSpPr>
+        <p:spPr>
+          <a:xfrm>
+            <a:off x="10607040" y="6309360"/>
+            <a:ext cx="914400" cy="274320"/>
+          </a:xfrm>
+          <a:prstGeom prst="rect">
+            <a:avLst/>
+          </a:prstGeom>
+          <a:noFill/>
+        </p:spPr>
+        <p:txBody>
+          <a:bodyPr wrap="square">
+            <a:spAutoFit/>
+          </a:bodyPr>
+          <a:lstStyle/>
+          <a:p>
+            <a:r>
+              <a:rPr sz="1100" b="0">
+                <a:solidFill>
+                  <a:srgbClr val="9C998D"/>
+                </a:solidFill>
+                <a:latin typeface="Courier New"/>
+              </a:rPr>
+              <a:t>10</a:t>
+            </a:r>
+          </a:p>
+        </p:txBody>
+      </p:sp>
+    </p:spTree>
+  </p:cSld>
+  <p:clrMapOvr>
+    <a:masterClrMapping/>
+  </p:clrMapOvr>
+</p:sld>
+</file>
+
 <file path=ppt/slides/slide2.xml><?xml version="1.0" encoding="utf-8"?>
 <p:sld xmlns:a="http://schemas.openxmlformats.org/drawingml/2006/main" xmlns:r="http://schemas.openxmlformats.org/officeDocument/2006/relationships" xmlns:p="http://schemas.openxmlformats.org/presentationml/2006/main">
   <p:cSld name="Slide 2">
@@ -2656,7 +3246,7 @@
                 <a:ea typeface="Calibri" pitchFamily="34" charset="-122"/>
                 <a:cs typeface="Calibri" pitchFamily="34" charset="-120"/>
               </a:rPr>
-              <a:t>Write, dictate or photograph what you saw. The device shows what it will share before you save.</a:t>
+              <a:t>Write, dictate or photograph what you saw. Speech is transcribed on the device. The preview shows what will be shared before you save.</a:t>
             </a:r>
             <a:endParaRPr lang="en-US" sz="1600" dirty="0"/>
           </a:p>
@@ -7676,7 +8266,7 @@
                 <a:ea typeface="Calibri" pitchFamily="34" charset="-122"/>
                 <a:cs typeface="Calibri" pitchFamily="34" charset="-120"/>
               </a:rPr>
-              <a:t>Ryzen 7 7435HS laptop, RTX 3050 4 GB. Also verified on Linux through a real network disconnect, and on arm64.</a:t>
+              <a:t>Ryzen 7 7435HS laptop, RTX 3050 4 GB. Also verified on Linux, and in production on two arm64 servers with Qdrant Cloud.</a:t>
             </a:r>
             <a:endParaRPr lang="en-US" sz="1200" dirty="0"/>
           </a:p>
@@ -8410,7 +9000,7 @@
                 <a:ea typeface="Calibri" pitchFamily="34" charset="-122"/>
                 <a:cs typeface="Calibri" pitchFamily="34" charset="-120"/>
               </a:rPr>
-              <a:t>Private text sealed on disk</a:t>
+              <a:t>Dictation transcribed on the device (Whisper)</a:t>
             </a:r>
             <a:endParaRPr lang="en-US" sz="1700" dirty="0"/>
           </a:p>
@@ -8431,7 +9021,7 @@
                 <a:ea typeface="Calibri" pitchFamily="34" charset="-122"/>
                 <a:cs typeface="Calibri" pitchFamily="34" charset="-120"/>
               </a:rPr>
-              <a:t>Setup code claims the first PIN</a:t>
+              <a:t>Private text sealed on disk</a:t>
             </a:r>
             <a:endParaRPr lang="en-US" sz="1700" dirty="0"/>
           </a:p>
@@ -8452,7 +9042,7 @@
                 <a:ea typeface="Calibri" pitchFamily="34" charset="-122"/>
                 <a:cs typeface="Calibri" pitchFamily="34" charset="-120"/>
               </a:rPr>
-              <a:t>Devices learn from each other offline</a:t>
+              <a:t>Devices learn from each other when the cloud is gone</a:t>
             </a:r>
             <a:endParaRPr lang="en-US" sz="1700" dirty="0"/>
           </a:p>
@@ -8494,7 +9084,7 @@
                 <a:ea typeface="Calibri" pitchFamily="34" charset="-122"/>
                 <a:cs typeface="Calibri" pitchFamily="34" charset="-120"/>
               </a:rPr>
-              <a:t>Encrypted backup to a new device</a:t>
+              <a:t>Encrypted backup, shift report, one-click conflict</a:t>
             </a:r>
             <a:endParaRPr lang="en-US" sz="1700" dirty="0"/>
           </a:p>
@@ -8515,7 +9105,7 @@
                 <a:ea typeface="Calibri" pitchFamily="34" charset="-122"/>
                 <a:cs typeface="Calibri" pitchFamily="34" charset="-120"/>
               </a:rPr>
-              <a:t>Shift report, phone layout, dictation</a:t>
+              <a:t>Installable on a phone; Hindi optional</a:t>
             </a:r>
             <a:endParaRPr lang="en-US" sz="1700" dirty="0"/>
           </a:p>

--- a/docs/FieldMind-Compilers.pptx
+++ b/docs/FieldMind-Compilers.pptx
@@ -1612,6 +1612,10 @@
             <a:prstDash val="solid"/>
           </a:ln>
         </p:spPr>
+        <p:txBody>
+          <a:bodyPr/>
+          <a:p/>
+        </p:txBody>
       </p:sp>
       <p:sp>
         <p:nvSpPr>
@@ -1637,6 +1641,10 @@
             <a:prstDash val="solid"/>
           </a:ln>
         </p:spPr>
+        <p:txBody>
+          <a:bodyPr/>
+          <a:p/>
+        </p:txBody>
       </p:sp>
       <p:sp>
         <p:nvSpPr>
@@ -2234,7 +2242,7 @@
                 </a:solidFill>
                 <a:latin typeface="Calibri"/>
               </a:rPr>
-              <a:t>MIT. 106 tests on every push against a real Qdrant Server and a real browser. docker compose --profile demo up runs it on any laptop.</a:t>
+              <a:t>MIT. 111 tests on every push against a real Qdrant Server and a real browser. docker compose --profile demo up runs it on any laptop.</a:t>
             </a:r>
           </a:p>
         </p:txBody>
@@ -2349,7 +2357,7 @@
                 </a:solidFill>
                 <a:latin typeface="Calibri"/>
               </a:rPr>
-              <a:t>Network switch off, keep working  ·  Dictate a note  ·  Ask “is a vibration of 7.2 mm/s acceptable”  ·  Type a note with a name and a phone number, watch the preview mask them  ·  Demo guide → Stage a conflict, then decide</a:t>
+              <a:t>Network switch off, keep working  ·  Dictate: just talk, in any language  ·  Ask “is a vibration of 7.2 mm/s acceptable”  ·  Type a note with a name and a phone number, watch the preview mask them  ·  Demo guide → Stage a conflict, then decide</a:t>
             </a:r>
           </a:p>
         </p:txBody>
@@ -2519,6 +2527,10 @@
             <a:prstDash val="solid"/>
           </a:ln>
         </p:spPr>
+        <p:txBody>
+          <a:bodyPr/>
+          <a:p/>
+        </p:txBody>
       </p:sp>
       <p:sp>
         <p:nvSpPr>
@@ -2544,6 +2556,10 @@
             <a:prstDash val="solid"/>
           </a:ln>
         </p:spPr>
+        <p:txBody>
+          <a:bodyPr/>
+          <a:p/>
+        </p:txBody>
       </p:sp>
       <p:sp>
         <p:nvSpPr>
@@ -2688,6 +2704,10 @@
             <a:prstDash val="solid"/>
           </a:ln>
         </p:spPr>
+        <p:txBody>
+          <a:bodyPr/>
+          <a:p/>
+        </p:txBody>
       </p:sp>
       <p:sp>
         <p:nvSpPr>
@@ -2713,6 +2733,10 @@
             <a:prstDash val="solid"/>
           </a:ln>
         </p:spPr>
+        <p:txBody>
+          <a:bodyPr/>
+          <a:p/>
+        </p:txBody>
       </p:sp>
       <p:sp>
         <p:nvSpPr>
@@ -2857,6 +2881,10 @@
             <a:prstDash val="solid"/>
           </a:ln>
         </p:spPr>
+        <p:txBody>
+          <a:bodyPr/>
+          <a:p/>
+        </p:txBody>
       </p:sp>
       <p:sp>
         <p:nvSpPr>
@@ -2882,6 +2910,10 @@
             <a:prstDash val="solid"/>
           </a:ln>
         </p:spPr>
+        <p:txBody>
+          <a:bodyPr/>
+          <a:p/>
+        </p:txBody>
       </p:sp>
       <p:sp>
         <p:nvSpPr>
@@ -3134,6 +3166,10 @@
             <a:prstDash val="solid"/>
           </a:ln>
         </p:spPr>
+        <p:txBody>
+          <a:bodyPr/>
+          <a:p/>
+        </p:txBody>
       </p:sp>
       <p:sp>
         <p:nvSpPr>
@@ -3246,7 +3282,7 @@
                 <a:ea typeface="Calibri" pitchFamily="34" charset="-122"/>
                 <a:cs typeface="Calibri" pitchFamily="34" charset="-120"/>
               </a:rPr>
-              <a:t>Write, dictate or photograph what you saw. Speech is transcribed on the device. The preview shows what will be shared before you save.</a:t>
+              <a:t>Write, dictate or photograph what you saw. Hands-free dictation in any language, transcribed on the device. The preview shows what will be shared before you save.</a:t>
             </a:r>
             <a:endParaRPr lang="en-US" sz="1600" dirty="0"/>
           </a:p>
@@ -3276,6 +3312,10 @@
             <a:prstDash val="solid"/>
           </a:ln>
         </p:spPr>
+        <p:txBody>
+          <a:bodyPr/>
+          <a:p/>
+        </p:txBody>
       </p:sp>
       <p:sp>
         <p:nvSpPr>
@@ -3418,6 +3458,10 @@
             <a:prstDash val="solid"/>
           </a:ln>
         </p:spPr>
+        <p:txBody>
+          <a:bodyPr/>
+          <a:p/>
+        </p:txBody>
       </p:sp>
       <p:sp>
         <p:nvSpPr>
@@ -3567,6 +3611,10 @@
             </a:outerShdw>
           </a:effectLst>
         </p:spPr>
+        <p:txBody>
+          <a:bodyPr/>
+          <a:p/>
+        </p:txBody>
       </p:sp>
       <p:sp>
         <p:nvSpPr>
@@ -3728,6 +3776,10 @@
             <a:prstDash val="solid"/>
           </a:ln>
         </p:spPr>
+        <p:txBody>
+          <a:bodyPr/>
+          <a:p/>
+        </p:txBody>
       </p:sp>
       <p:sp>
         <p:nvSpPr>
@@ -3794,6 +3846,10 @@
             <a:prstDash val="solid"/>
           </a:ln>
         </p:spPr>
+        <p:txBody>
+          <a:bodyPr/>
+          <a:p/>
+        </p:txBody>
       </p:sp>
       <p:sp>
         <p:nvSpPr>
@@ -3899,6 +3955,10 @@
             <a:prstDash val="solid"/>
           </a:ln>
         </p:spPr>
+        <p:txBody>
+          <a:bodyPr/>
+          <a:p/>
+        </p:txBody>
       </p:sp>
       <p:sp>
         <p:nvSpPr>
@@ -4004,6 +4064,10 @@
             <a:prstDash val="solid"/>
           </a:ln>
         </p:spPr>
+        <p:txBody>
+          <a:bodyPr/>
+          <a:p/>
+        </p:txBody>
       </p:sp>
       <p:sp>
         <p:nvSpPr>
@@ -4109,6 +4173,10 @@
             <a:prstDash val="solid"/>
           </a:ln>
         </p:spPr>
+        <p:txBody>
+          <a:bodyPr/>
+          <a:p/>
+        </p:txBody>
       </p:sp>
       <p:sp>
         <p:nvSpPr>
@@ -4214,6 +4282,10 @@
             <a:prstDash val="solid"/>
           </a:ln>
         </p:spPr>
+        <p:txBody>
+          <a:bodyPr/>
+          <a:p/>
+        </p:txBody>
       </p:sp>
       <p:sp>
         <p:nvSpPr>
@@ -4319,6 +4391,10 @@
             <a:prstDash val="solid"/>
           </a:ln>
         </p:spPr>
+        <p:txBody>
+          <a:bodyPr/>
+          <a:p/>
+        </p:txBody>
       </p:sp>
       <p:sp>
         <p:nvSpPr>
@@ -4461,6 +4537,10 @@
             <a:prstDash val="solid"/>
           </a:ln>
         </p:spPr>
+        <p:txBody>
+          <a:bodyPr/>
+          <a:p/>
+        </p:txBody>
       </p:sp>
       <p:sp>
         <p:nvSpPr>
@@ -4564,6 +4644,10 @@
             <a:prstDash val="solid"/>
           </a:ln>
         </p:spPr>
+        <p:txBody>
+          <a:bodyPr/>
+          <a:p/>
+        </p:txBody>
       </p:sp>
       <p:sp>
         <p:nvSpPr>
@@ -4630,6 +4714,10 @@
             <a:prstDash val="solid"/>
           </a:ln>
         </p:spPr>
+        <p:txBody>
+          <a:bodyPr/>
+          <a:p/>
+        </p:txBody>
       </p:sp>
       <p:sp>
         <p:nvSpPr>
@@ -5926,6 +6014,10 @@
             <a:prstDash val="solid"/>
           </a:ln>
         </p:spPr>
+        <p:txBody>
+          <a:bodyPr/>
+          <a:p/>
+        </p:txBody>
       </p:sp>
       <p:sp>
         <p:nvSpPr>
@@ -6068,6 +6160,10 @@
             <a:prstDash val="solid"/>
           </a:ln>
         </p:spPr>
+        <p:txBody>
+          <a:bodyPr/>
+          <a:p/>
+        </p:txBody>
       </p:sp>
       <p:sp>
         <p:nvSpPr>
@@ -6210,6 +6306,10 @@
             <a:prstDash val="solid"/>
           </a:ln>
         </p:spPr>
+        <p:txBody>
+          <a:bodyPr/>
+          <a:p/>
+        </p:txBody>
       </p:sp>
       <p:sp>
         <p:nvSpPr>
@@ -6359,6 +6459,10 @@
             </a:outerShdw>
           </a:effectLst>
         </p:spPr>
+        <p:txBody>
+          <a:bodyPr/>
+          <a:p/>
+        </p:txBody>
       </p:sp>
       <p:sp>
         <p:nvSpPr>
@@ -7629,6 +7733,10 @@
             <a:prstDash val="solid"/>
           </a:ln>
         </p:spPr>
+        <p:txBody>
+          <a:bodyPr/>
+          <a:p/>
+        </p:txBody>
       </p:sp>
       <p:sp>
         <p:nvSpPr>
@@ -7734,6 +7842,10 @@
             <a:prstDash val="solid"/>
           </a:ln>
         </p:spPr>
+        <p:txBody>
+          <a:bodyPr/>
+          <a:p/>
+        </p:txBody>
       </p:sp>
       <p:sp>
         <p:nvSpPr>
@@ -7839,6 +7951,10 @@
             <a:prstDash val="solid"/>
           </a:ln>
         </p:spPr>
+        <p:txBody>
+          <a:bodyPr/>
+          <a:p/>
+        </p:txBody>
       </p:sp>
       <p:sp>
         <p:nvSpPr>
@@ -7944,6 +8060,10 @@
             <a:prstDash val="solid"/>
           </a:ln>
         </p:spPr>
+        <p:txBody>
+          <a:bodyPr/>
+          <a:p/>
+        </p:txBody>
       </p:sp>
       <p:sp>
         <p:nvSpPr>
@@ -8049,6 +8169,10 @@
             <a:prstDash val="solid"/>
           </a:ln>
         </p:spPr>
+        <p:txBody>
+          <a:bodyPr/>
+          <a:p/>
+        </p:txBody>
       </p:sp>
       <p:sp>
         <p:nvSpPr>
@@ -8083,7 +8207,7 @@
                 <a:ea typeface="Arial" pitchFamily="34" charset="-122"/>
                 <a:cs typeface="Arial" pitchFamily="34" charset="-120"/>
               </a:rPr>
-              <a:t>106</a:t>
+              <a:t>111</a:t>
             </a:r>
             <a:endParaRPr lang="en-US" sz="5400" dirty="0"/>
           </a:p>
@@ -8154,6 +8278,10 @@
             <a:prstDash val="solid"/>
           </a:ln>
         </p:spPr>
+        <p:txBody>
+          <a:bodyPr/>
+          <a:p/>
+        </p:txBody>
       </p:sp>
       <p:sp>
         <p:nvSpPr>
@@ -8406,6 +8534,10 @@
             <a:prstDash val="solid"/>
           </a:ln>
         </p:spPr>
+        <p:txBody>
+          <a:bodyPr/>
+          <a:p/>
+        </p:txBody>
       </p:sp>
       <p:sp>
         <p:nvSpPr>
@@ -8509,6 +8641,10 @@
             <a:prstDash val="solid"/>
           </a:ln>
         </p:spPr>
+        <p:txBody>
+          <a:bodyPr/>
+          <a:p/>
+        </p:txBody>
       </p:sp>
       <p:sp>
         <p:nvSpPr>
@@ -8612,6 +8748,10 @@
             <a:prstDash val="solid"/>
           </a:ln>
         </p:spPr>
+        <p:txBody>
+          <a:bodyPr/>
+          <a:p/>
+        </p:txBody>
       </p:sp>
       <p:sp>
         <p:nvSpPr>
@@ -8715,6 +8855,10 @@
             <a:prstDash val="solid"/>
           </a:ln>
         </p:spPr>
+        <p:txBody>
+          <a:bodyPr/>
+          <a:p/>
+        </p:txBody>
       </p:sp>
       <p:sp>
         <p:nvSpPr>
@@ -8818,6 +8962,10 @@
             <a:prstDash val="solid"/>
           </a:ln>
         </p:spPr>
+        <p:txBody>
+          <a:bodyPr/>
+          <a:p/>
+        </p:txBody>
       </p:sp>
       <p:sp>
         <p:nvSpPr>
@@ -8923,6 +9071,10 @@
             <a:prstDash val="solid"/>
           </a:ln>
         </p:spPr>
+        <p:txBody>
+          <a:bodyPr/>
+          <a:p/>
+        </p:txBody>
       </p:sp>
       <p:sp>
         <p:nvSpPr>
@@ -9000,112 +9152,7 @@
                 <a:ea typeface="Calibri" pitchFamily="34" charset="-122"/>
                 <a:cs typeface="Calibri" pitchFamily="34" charset="-120"/>
               </a:rPr>
-              <a:t>Dictation transcribed on the device (Whisper)</a:t>
-            </a:r>
-            <a:endParaRPr lang="en-US" sz="1700" dirty="0"/>
-          </a:p>
-          <a:p>
-            <a:pPr marL="342900" indent="-342900">
-              <a:spcAft>
-                <a:spcPts val="1200"/>
-              </a:spcAft>
-              <a:buSzPct val="100000"/>
-              <a:buChar char="•"/>
-            </a:pPr>
-            <a:r>
-              <a:rPr lang="en-US" sz="1700" dirty="0">
-                <a:solidFill>
-                  <a:srgbClr val="BDBBB0"/>
-                </a:solidFill>
-                <a:latin typeface="Calibri" pitchFamily="34" charset="0"/>
-                <a:ea typeface="Calibri" pitchFamily="34" charset="-122"/>
-                <a:cs typeface="Calibri" pitchFamily="34" charset="-120"/>
-              </a:rPr>
-              <a:t>Private text sealed on disk</a:t>
-            </a:r>
-            <a:endParaRPr lang="en-US" sz="1700" dirty="0"/>
-          </a:p>
-          <a:p>
-            <a:pPr marL="342900" indent="-342900">
-              <a:spcAft>
-                <a:spcPts val="1200"/>
-              </a:spcAft>
-              <a:buSzPct val="100000"/>
-              <a:buChar char="•"/>
-            </a:pPr>
-            <a:r>
-              <a:rPr lang="en-US" sz="1700" dirty="0">
-                <a:solidFill>
-                  <a:srgbClr val="BDBBB0"/>
-                </a:solidFill>
-                <a:latin typeface="Calibri" pitchFamily="34" charset="0"/>
-                <a:ea typeface="Calibri" pitchFamily="34" charset="-122"/>
-                <a:cs typeface="Calibri" pitchFamily="34" charset="-120"/>
-              </a:rPr>
-              <a:t>Devices learn from each other when the cloud is gone</a:t>
-            </a:r>
-            <a:endParaRPr lang="en-US" sz="1700" dirty="0"/>
-          </a:p>
-          <a:p>
-            <a:pPr marL="342900" indent="-342900">
-              <a:spcAft>
-                <a:spcPts val="1200"/>
-              </a:spcAft>
-              <a:buSzPct val="100000"/>
-              <a:buChar char="•"/>
-            </a:pPr>
-            <a:r>
-              <a:rPr lang="en-US" sz="1700" dirty="0">
-                <a:solidFill>
-                  <a:srgbClr val="BDBBB0"/>
-                </a:solidFill>
-                <a:latin typeface="Calibri" pitchFamily="34" charset="0"/>
-                <a:ea typeface="Calibri" pitchFamily="34" charset="-122"/>
-                <a:cs typeface="Calibri" pitchFamily="34" charset="-120"/>
-              </a:rPr>
-              <a:t>Photos searchable by what they show</a:t>
-            </a:r>
-            <a:endParaRPr lang="en-US" sz="1700" dirty="0"/>
-          </a:p>
-          <a:p>
-            <a:pPr marL="342900" indent="-342900">
-              <a:spcAft>
-                <a:spcPts val="1200"/>
-              </a:spcAft>
-              <a:buSzPct val="100000"/>
-              <a:buChar char="•"/>
-            </a:pPr>
-            <a:r>
-              <a:rPr lang="en-US" sz="1700" dirty="0">
-                <a:solidFill>
-                  <a:srgbClr val="BDBBB0"/>
-                </a:solidFill>
-                <a:latin typeface="Calibri" pitchFamily="34" charset="0"/>
-                <a:ea typeface="Calibri" pitchFamily="34" charset="-122"/>
-                <a:cs typeface="Calibri" pitchFamily="34" charset="-120"/>
-              </a:rPr>
-              <a:t>Encrypted backup, shift report, one-click conflict</a:t>
-            </a:r>
-            <a:endParaRPr lang="en-US" sz="1700" dirty="0"/>
-          </a:p>
-          <a:p>
-            <a:pPr marL="342900" indent="-342900">
-              <a:spcAft>
-                <a:spcPts val="1200"/>
-              </a:spcAft>
-              <a:buSzPct val="100000"/>
-              <a:buChar char="•"/>
-            </a:pPr>
-            <a:r>
-              <a:rPr lang="en-US" sz="1700" dirty="0">
-                <a:solidFill>
-                  <a:srgbClr val="BDBBB0"/>
-                </a:solidFill>
-                <a:latin typeface="Calibri" pitchFamily="34" charset="0"/>
-                <a:ea typeface="Calibri" pitchFamily="34" charset="-122"/>
-                <a:cs typeface="Calibri" pitchFamily="34" charset="-120"/>
-              </a:rPr>
-              <a:t>Installable on a phone; Hindi optional</a:t>
+              <a:t>Hands-free dictation in any language, on the device</a:t>
             </a:r>
             <a:endParaRPr lang="en-US" sz="1700" dirty="0"/>
           </a:p>

--- a/docs/FieldMind-Compilers.pptx
+++ b/docs/FieldMind-Compilers.pptx
@@ -2242,7 +2242,7 @@
                 </a:solidFill>
                 <a:latin typeface="Calibri"/>
               </a:rPr>
-              <a:t>MIT. 111 tests on every push against a real Qdrant Server and a real browser. docker compose --profile demo up runs it on any laptop.</a:t>
+              <a:t>MIT. 123 tests on every push against a real Qdrant Server and a real browser. docker compose --profile demo up runs it on any laptop.</a:t>
             </a:r>
           </a:p>
         </p:txBody>
@@ -8207,7 +8207,7 @@
                 <a:ea typeface="Arial" pitchFamily="34" charset="-122"/>
                 <a:cs typeface="Arial" pitchFamily="34" charset="-120"/>
               </a:rPr>
-              <a:t>111</a:t>
+              <a:t>123</a:t>
             </a:r>
             <a:endParaRPr lang="en-US" sz="5400" dirty="0"/>
           </a:p>

--- a/docs/FieldMind-Compilers.pptx
+++ b/docs/FieldMind-Compilers.pptx
@@ -2242,7 +2242,7 @@
                 </a:solidFill>
                 <a:latin typeface="Calibri"/>
               </a:rPr>
-              <a:t>MIT. 123 tests on every push against a real Qdrant Server and a real browser. docker compose --profile demo up runs it on any laptop.</a:t>
+              <a:t>MIT. 132 tests on every push against a real Qdrant Server and a real browser. docker compose --profile demo up runs it on any laptop.</a:t>
             </a:r>
           </a:p>
         </p:txBody>
@@ -8207,7 +8207,7 @@
                 <a:ea typeface="Arial" pitchFamily="34" charset="-122"/>
                 <a:cs typeface="Arial" pitchFamily="34" charset="-120"/>
               </a:rPr>
-              <a:t>123</a:t>
+              <a:t>132</a:t>
             </a:r>
             <a:endParaRPr lang="en-US" sz="5400" dirty="0"/>
           </a:p>

--- a/docs/FieldMind-Compilers.pptx
+++ b/docs/FieldMind-Compilers.pptx
@@ -2242,7 +2242,7 @@
                 </a:solidFill>
                 <a:latin typeface="Calibri"/>
               </a:rPr>
-              <a:t>MIT. 132 tests on every push against a real Qdrant Server and a real browser. docker compose --profile demo up runs it on any laptop.</a:t>
+              <a:t>MIT. 141 tests on every push against a real Qdrant Server and a real browser. docker compose --profile demo up runs it on any laptop.</a:t>
             </a:r>
           </a:p>
         </p:txBody>
@@ -8207,7 +8207,7 @@
                 <a:ea typeface="Arial" pitchFamily="34" charset="-122"/>
                 <a:cs typeface="Arial" pitchFamily="34" charset="-120"/>
               </a:rPr>
-              <a:t>132</a:t>
+              <a:t>141</a:t>
             </a:r>
             <a:endParaRPr lang="en-US" sz="5400" dirty="0"/>
           </a:p>

--- a/docs/FieldMind-Compilers.pptx
+++ b/docs/FieldMind-Compilers.pptx
@@ -2242,7 +2242,7 @@
                 </a:solidFill>
                 <a:latin typeface="Calibri"/>
               </a:rPr>
-              <a:t>MIT. 141 tests on every push against a real Qdrant Server and a real browser. docker compose --profile demo up runs it on any laptop.</a:t>
+              <a:t>MIT. 145 tests on every push against a real Qdrant Server and a real browser. docker compose --profile demo up runs it on any laptop.</a:t>
             </a:r>
           </a:p>
         </p:txBody>
@@ -8207,7 +8207,7 @@
                 <a:ea typeface="Arial" pitchFamily="34" charset="-122"/>
                 <a:cs typeface="Arial" pitchFamily="34" charset="-120"/>
               </a:rPr>
-              <a:t>141</a:t>
+              <a:t>145</a:t>
             </a:r>
             <a:endParaRPr lang="en-US" sz="5400" dirty="0"/>
           </a:p>
